--- a/assets/powerpoints/module-restaurant/A3-lire-un-menu.pptx
+++ b/assets/powerpoints/module-restaurant/A3-lire-un-menu.pptx
@@ -12592,7 +12592,25 @@
                 </a:solidFill>
                 <a:latin typeface="Verdana"/>
               </a:rPr>
-              <a:t>Dans plusieurs pays, « le menu » est la liste complète. Ici, la liste complète s'appelle &lt;b&gt;la carte&lt;/b&gt;, et « le menu » désigne une formule : menu du jour, menu du midi, menu à 25 $. La confusion est fréquente et sans gravité, mais elle fait perdre du temps.</a:t>
+              <a:t>Dans plusieurs pays, « le menu » est la liste complète. Ici, la liste complète s'appelle </a:t>
+            </a:r>
+            <a:r>
+              <a:rPr sz="2000" b="1" i="0">
+                <a:solidFill>
+                  <a:srgbClr val="4B4F52"/>
+                </a:solidFill>
+                <a:latin typeface="Verdana"/>
+              </a:rPr>
+              <a:t>la carte</a:t>
+            </a:r>
+            <a:r>
+              <a:rPr sz="2000" b="0" i="0">
+                <a:solidFill>
+                  <a:srgbClr val="4B4F52"/>
+                </a:solidFill>
+                <a:latin typeface="Verdana"/>
+              </a:rPr>
+              <a:t>, et « le menu » désigne une formule : menu du jour, menu du midi, menu à 25 $. La confusion est fréquente et sans gravité, mais elle fait perdre du temps.</a:t>
             </a:r>
           </a:p>
         </p:txBody>
